--- a/presentacion_análisis_cibersec_MRMF.pptx
+++ b/presentacion_análisis_cibersec_MRMF.pptx
@@ -11478,7 +11478,55 @@
                 <a:cs typeface="Consolas"/>
                 <a:sym typeface="Consolas"/>
               </a:rPr>
-              <a:t>Evidencia journalctl </a:t>
+              <a:t>Evidencia </a:t>
+            </a:r>
+            <a:r>
+              <a:rPr lang="en-US" sz="1100">
+                <a:solidFill>
+                  <a:srgbClr val="1E2761"/>
+                </a:solidFill>
+                <a:latin typeface="Consolas"/>
+                <a:ea typeface="Consolas"/>
+                <a:cs typeface="Consolas"/>
+                <a:sym typeface="Consolas"/>
+              </a:rPr>
+              <a:t>de </a:t>
+            </a:r>
+            <a:r>
+              <a:rPr b="0" i="0" lang="en-US" sz="1100" u="none" cap="none" strike="noStrike">
+                <a:solidFill>
+                  <a:srgbClr val="1E2761"/>
+                </a:solidFill>
+                <a:latin typeface="Consolas"/>
+                <a:ea typeface="Consolas"/>
+                <a:cs typeface="Consolas"/>
+                <a:sym typeface="Consolas"/>
+              </a:rPr>
+              <a:t>journalctl </a:t>
+            </a:r>
+            <a:r>
+              <a:rPr lang="en-US" sz="1100">
+                <a:solidFill>
+                  <a:srgbClr val="1E2761"/>
+                </a:solidFill>
+                <a:latin typeface="Consolas"/>
+                <a:ea typeface="Consolas"/>
+                <a:cs typeface="Consolas"/>
+                <a:sym typeface="Consolas"/>
+              </a:rPr>
+              <a:t>→</a:t>
+            </a:r>
+            <a:r>
+              <a:rPr b="0" i="0" lang="en-US" sz="1100" u="none" cap="none" strike="noStrike">
+                <a:solidFill>
+                  <a:srgbClr val="1E2761"/>
+                </a:solidFill>
+                <a:latin typeface="Consolas"/>
+                <a:ea typeface="Consolas"/>
+                <a:cs typeface="Consolas"/>
+                <a:sym typeface="Consolas"/>
+              </a:rPr>
+              <a:t> Oct 08 17:40:59 </a:t>
             </a:r>
             <a:r>
               <a:rPr lang="en-US" sz="1100">
@@ -11502,33 +11550,9 @@
                 <a:cs typeface="Consolas"/>
                 <a:sym typeface="Consolas"/>
               </a:rPr>
-              <a:t> Oct 08 17:40:59 </a:t>
-            </a:r>
-            <a:r>
-              <a:rPr lang="en-US" sz="1100">
-                <a:solidFill>
-                  <a:srgbClr val="1E2761"/>
-                </a:solidFill>
-                <a:latin typeface="Consolas"/>
-                <a:ea typeface="Consolas"/>
-                <a:cs typeface="Consolas"/>
-                <a:sym typeface="Consolas"/>
-              </a:rPr>
-              <a:t>-</a:t>
-            </a:r>
-            <a:r>
-              <a:rPr b="0" i="0" lang="en-US" sz="1100" u="none" cap="none" strike="noStrike">
-                <a:solidFill>
-                  <a:srgbClr val="1E2761"/>
-                </a:solidFill>
-                <a:latin typeface="Consolas"/>
-                <a:ea typeface="Consolas"/>
-                <a:cs typeface="Consolas"/>
-                <a:sym typeface="Consolas"/>
-              </a:rPr>
               <a:t> Accepted password for root from 192.168.0.134 port 45623 ssh2</a:t>
             </a:r>
-            <a:endParaRPr b="0" i="0" sz="1100" u="none" cap="none" strike="noStrike">
+            <a:endParaRPr b="0" i="1" sz="1100" u="none" cap="none" strike="noStrike">
               <a:solidFill>
                 <a:schemeClr val="dk1"/>
               </a:solidFill>
@@ -17125,7 +17149,47 @@
             </a:r>
             <a:endParaRPr b="0" i="0" sz="1100" u="none" cap="none" strike="noStrike">
               <a:solidFill>
-                <a:schemeClr val="dk1"/>
+                <a:srgbClr val="1E2761"/>
+              </a:solidFill>
+              <a:latin typeface="Calibri"/>
+              <a:ea typeface="Calibri"/>
+              <a:cs typeface="Calibri"/>
+              <a:sym typeface="Calibri"/>
+            </a:endParaRPr>
+          </a:p>
+          <a:p>
+            <a:pPr indent="0" lvl="0" marL="0" marR="0" rtl="0" algn="l">
+              <a:lnSpc>
+                <a:spcPct val="100000"/>
+              </a:lnSpc>
+              <a:spcBef>
+                <a:spcPts val="0"/>
+              </a:spcBef>
+              <a:spcAft>
+                <a:spcPts val="0"/>
+              </a:spcAft>
+              <a:buClr>
+                <a:srgbClr val="1E2761"/>
+              </a:buClr>
+              <a:buSzPts val="1100"/>
+              <a:buFont typeface="Calibri"/>
+              <a:buNone/>
+            </a:pPr>
+            <a:r>
+              <a:rPr lang="en-US" sz="1100">
+                <a:solidFill>
+                  <a:srgbClr val="1E2761"/>
+                </a:solidFill>
+                <a:latin typeface="Calibri"/>
+                <a:ea typeface="Calibri"/>
+                <a:cs typeface="Calibri"/>
+                <a:sym typeface="Calibri"/>
+              </a:rPr>
+              <a:t>iptables DROP 192.168.0.134</a:t>
+            </a:r>
+            <a:endParaRPr sz="1100">
+              <a:solidFill>
+                <a:srgbClr val="1E2761"/>
               </a:solidFill>
               <a:latin typeface="Calibri"/>
               <a:ea typeface="Calibri"/>
